--- a/FITFUEL-Project-Overview.pptx
+++ b/FITFUEL-Project-Overview.pptx
@@ -5,18 +5,18 @@
     <p:sldMasterId id="2147483648" r:id="rId1"/>
   </p:sldMasterIdLst>
   <p:sldIdLst>
-    <p:sldId id="256" r:id="rId7"/>
-    <p:sldId id="257" r:id="rId8"/>
-    <p:sldId id="258" r:id="rId9"/>
-    <p:sldId id="259" r:id="rId10"/>
-    <p:sldId id="260" r:id="rId11"/>
-    <p:sldId id="261" r:id="rId12"/>
-    <p:sldId id="262" r:id="rId13"/>
-    <p:sldId id="263" r:id="rId14"/>
-    <p:sldId id="264" r:id="rId15"/>
-    <p:sldId id="265" r:id="rId16"/>
+    <p:sldId id="256" r:id="rId2"/>
+    <p:sldId id="257" r:id="rId3"/>
+    <p:sldId id="258" r:id="rId4"/>
+    <p:sldId id="259" r:id="rId5"/>
+    <p:sldId id="260" r:id="rId6"/>
+    <p:sldId id="261" r:id="rId7"/>
+    <p:sldId id="262" r:id="rId8"/>
+    <p:sldId id="263" r:id="rId9"/>
+    <p:sldId id="264" r:id="rId10"/>
+    <p:sldId id="265" r:id="rId11"/>
   </p:sldIdLst>
-  <p:sldSz cx="12191695" cy="6858000" type="screen4x3"/>
+  <p:sldSz cx="12192000" cy="6858000"/>
   <p:notesSz cx="6858000" cy="9144000"/>
   <p:defaultTextStyle>
     <a:defPPr>
@@ -113,7 +113,52 @@
       </a:defRPr>
     </a:lvl9pPr>
   </p:defaultTextStyle>
+  <p:extLst>
+    <p:ext uri="{EFAFB233-063F-42B5-8137-9DF3F51BA10A}">
+      <p15:sldGuideLst xmlns:p15="http://schemas.microsoft.com/office/powerpoint/2012/main">
+        <p15:guide id="1" orient="horz" pos="2160">
+          <p15:clr>
+            <a:srgbClr val="A4A3A4"/>
+          </p15:clr>
+        </p15:guide>
+        <p15:guide id="2" pos="2880">
+          <p15:clr>
+            <a:srgbClr val="A4A3A4"/>
+          </p15:clr>
+        </p15:guide>
+      </p15:sldGuideLst>
+    </p:ext>
+  </p:extLst>
 </p:presentation>
+</file>
+
+<file path=ppt/changesInfos/changesInfo1.xml><?xml version="1.0" encoding="utf-8"?>
+<pc:chgInfo xmlns:a="http://schemas.openxmlformats.org/drawingml/2006/main" xmlns:r="http://schemas.openxmlformats.org/officeDocument/2006/relationships" xmlns:ac="http://schemas.microsoft.com/office/drawing/2013/main/command" xmlns:pc="http://schemas.microsoft.com/office/powerpoint/2013/main/command">
+  <pc:docChgLst>
+    <pc:chgData name="Aayush Sharma" userId="60a79ffc93a9b62b" providerId="LiveId" clId="{46299DD3-A4DF-45F3-8996-5374FE185D78}"/>
+    <pc:docChg chg="modSld">
+      <pc:chgData name="Aayush Sharma" userId="60a79ffc93a9b62b" providerId="LiveId" clId="{46299DD3-A4DF-45F3-8996-5374FE185D78}" dt="2026-10-14T17:28:24.969" v="5" actId="20577"/>
+      <pc:docMkLst>
+        <pc:docMk/>
+      </pc:docMkLst>
+      <pc:sldChg chg="modSp mod">
+        <pc:chgData name="Aayush Sharma" userId="60a79ffc93a9b62b" providerId="LiveId" clId="{46299DD3-A4DF-45F3-8996-5374FE185D78}" dt="2026-10-14T17:28:24.969" v="5" actId="20577"/>
+        <pc:sldMkLst>
+          <pc:docMk/>
+          <pc:sldMk cId="0" sldId="259"/>
+        </pc:sldMkLst>
+        <pc:spChg chg="mod">
+          <ac:chgData name="Aayush Sharma" userId="60a79ffc93a9b62b" providerId="LiveId" clId="{46299DD3-A4DF-45F3-8996-5374FE185D78}" dt="2026-10-14T17:28:24.969" v="5" actId="20577"/>
+          <ac:spMkLst>
+            <pc:docMk/>
+            <pc:sldMk cId="0" sldId="259"/>
+            <ac:spMk id="8" creationId="{00000000-0000-0000-0000-000000000000}"/>
+          </ac:spMkLst>
+        </pc:spChg>
+      </pc:sldChg>
+    </pc:docChg>
+  </pc:docChgLst>
+</pc:chgInfo>
 </file>
 
 <file path=ppt/slideLayouts/slideLayout1.xml><?xml version="1.0" encoding="utf-8"?>
@@ -154,10 +199,9 @@
           <a:lstStyle/>
           <a:p>
             <a:r>
-              <a:rPr lang="en-US" smtClean="0"/>
+              <a:rPr lang="en-US"/>
               <a:t>Click to edit Master title style</a:t>
             </a:r>
-            <a:endParaRPr lang="en-US"/>
           </a:p>
         </p:txBody>
       </p:sp>
@@ -273,10 +317,9 @@
           </a:lstStyle>
           <a:p>
             <a:r>
-              <a:rPr lang="en-US" smtClean="0"/>
+              <a:rPr lang="en-US"/>
               <a:t>Click to edit Master subtitle style</a:t>
             </a:r>
-            <a:endParaRPr lang="en-US"/>
           </a:p>
         </p:txBody>
       </p:sp>
@@ -297,7 +340,7 @@
           <a:p>
             <a:fld id="{5BCAD085-E8A6-8845-BD4E-CB4CCA059FC4}" type="datetimeFigureOut">
               <a:rPr lang="en-US" smtClean="0"/>
-              <a:t>1/27/13</a:t>
+              <a:t>10/14/2026</a:t>
             </a:fld>
             <a:endParaRPr lang="en-US"/>
           </a:p>
@@ -391,10 +434,9 @@
           <a:lstStyle/>
           <a:p>
             <a:r>
-              <a:rPr lang="en-US" smtClean="0"/>
+              <a:rPr lang="en-US"/>
               <a:t>Click to edit Master title style</a:t>
             </a:r>
-            <a:endParaRPr lang="en-US"/>
           </a:p>
         </p:txBody>
       </p:sp>
@@ -415,38 +457,37 @@
           <a:p>
             <a:pPr lvl="0"/>
             <a:r>
-              <a:rPr lang="en-US" smtClean="0"/>
+              <a:rPr lang="en-US"/>
               <a:t>Click to edit Master text styles</a:t>
             </a:r>
           </a:p>
           <a:p>
             <a:pPr lvl="1"/>
             <a:r>
-              <a:rPr lang="en-US" smtClean="0"/>
+              <a:rPr lang="en-US"/>
               <a:t>Second level</a:t>
             </a:r>
           </a:p>
           <a:p>
             <a:pPr lvl="2"/>
             <a:r>
-              <a:rPr lang="en-US" smtClean="0"/>
+              <a:rPr lang="en-US"/>
               <a:t>Third level</a:t>
             </a:r>
           </a:p>
           <a:p>
             <a:pPr lvl="3"/>
             <a:r>
-              <a:rPr lang="en-US" smtClean="0"/>
+              <a:rPr lang="en-US"/>
               <a:t>Fourth level</a:t>
             </a:r>
           </a:p>
           <a:p>
             <a:pPr lvl="4"/>
             <a:r>
-              <a:rPr lang="en-US" smtClean="0"/>
+              <a:rPr lang="en-US"/>
               <a:t>Fifth level</a:t>
             </a:r>
-            <a:endParaRPr lang="en-US"/>
           </a:p>
         </p:txBody>
       </p:sp>
@@ -467,7 +508,7 @@
           <a:p>
             <a:fld id="{5BCAD085-E8A6-8845-BD4E-CB4CCA059FC4}" type="datetimeFigureOut">
               <a:rPr lang="en-US" smtClean="0"/>
-              <a:t>1/27/13</a:t>
+              <a:t>10/14/2026</a:t>
             </a:fld>
             <a:endParaRPr lang="en-US"/>
           </a:p>
@@ -566,10 +607,9 @@
           <a:lstStyle/>
           <a:p>
             <a:r>
-              <a:rPr lang="en-US" smtClean="0"/>
+              <a:rPr lang="en-US"/>
               <a:t>Click to edit Master title style</a:t>
             </a:r>
-            <a:endParaRPr lang="en-US"/>
           </a:p>
         </p:txBody>
       </p:sp>
@@ -595,38 +635,37 @@
           <a:p>
             <a:pPr lvl="0"/>
             <a:r>
-              <a:rPr lang="en-US" smtClean="0"/>
+              <a:rPr lang="en-US"/>
               <a:t>Click to edit Master text styles</a:t>
             </a:r>
           </a:p>
           <a:p>
             <a:pPr lvl="1"/>
             <a:r>
-              <a:rPr lang="en-US" smtClean="0"/>
+              <a:rPr lang="en-US"/>
               <a:t>Second level</a:t>
             </a:r>
           </a:p>
           <a:p>
             <a:pPr lvl="2"/>
             <a:r>
-              <a:rPr lang="en-US" smtClean="0"/>
+              <a:rPr lang="en-US"/>
               <a:t>Third level</a:t>
             </a:r>
           </a:p>
           <a:p>
             <a:pPr lvl="3"/>
             <a:r>
-              <a:rPr lang="en-US" smtClean="0"/>
+              <a:rPr lang="en-US"/>
               <a:t>Fourth level</a:t>
             </a:r>
           </a:p>
           <a:p>
             <a:pPr lvl="4"/>
             <a:r>
-              <a:rPr lang="en-US" smtClean="0"/>
+              <a:rPr lang="en-US"/>
               <a:t>Fifth level</a:t>
             </a:r>
-            <a:endParaRPr lang="en-US"/>
           </a:p>
         </p:txBody>
       </p:sp>
@@ -647,7 +686,7 @@
           <a:p>
             <a:fld id="{5BCAD085-E8A6-8845-BD4E-CB4CCA059FC4}" type="datetimeFigureOut">
               <a:rPr lang="en-US" smtClean="0"/>
-              <a:t>1/27/13</a:t>
+              <a:t>10/14/2026</a:t>
             </a:fld>
             <a:endParaRPr lang="en-US"/>
           </a:p>
@@ -741,10 +780,9 @@
           <a:lstStyle/>
           <a:p>
             <a:r>
-              <a:rPr lang="en-US" smtClean="0"/>
+              <a:rPr lang="en-US"/>
               <a:t>Click to edit Master title style</a:t>
             </a:r>
-            <a:endParaRPr lang="en-US"/>
           </a:p>
         </p:txBody>
       </p:sp>
@@ -765,38 +803,37 @@
           <a:p>
             <a:pPr lvl="0"/>
             <a:r>
-              <a:rPr lang="en-US" smtClean="0"/>
+              <a:rPr lang="en-US"/>
               <a:t>Click to edit Master text styles</a:t>
             </a:r>
           </a:p>
           <a:p>
             <a:pPr lvl="1"/>
             <a:r>
-              <a:rPr lang="en-US" smtClean="0"/>
+              <a:rPr lang="en-US"/>
               <a:t>Second level</a:t>
             </a:r>
           </a:p>
           <a:p>
             <a:pPr lvl="2"/>
             <a:r>
-              <a:rPr lang="en-US" smtClean="0"/>
+              <a:rPr lang="en-US"/>
               <a:t>Third level</a:t>
             </a:r>
           </a:p>
           <a:p>
             <a:pPr lvl="3"/>
             <a:r>
-              <a:rPr lang="en-US" smtClean="0"/>
+              <a:rPr lang="en-US"/>
               <a:t>Fourth level</a:t>
             </a:r>
           </a:p>
           <a:p>
             <a:pPr lvl="4"/>
             <a:r>
-              <a:rPr lang="en-US" smtClean="0"/>
+              <a:rPr lang="en-US"/>
               <a:t>Fifth level</a:t>
             </a:r>
-            <a:endParaRPr lang="en-US"/>
           </a:p>
         </p:txBody>
       </p:sp>
@@ -817,7 +854,7 @@
           <a:p>
             <a:fld id="{5BCAD085-E8A6-8845-BD4E-CB4CCA059FC4}" type="datetimeFigureOut">
               <a:rPr lang="en-US" smtClean="0"/>
-              <a:t>1/27/13</a:t>
+              <a:t>10/14/2026</a:t>
             </a:fld>
             <a:endParaRPr lang="en-US"/>
           </a:p>
@@ -920,10 +957,9 @@
           </a:lstStyle>
           <a:p>
             <a:r>
-              <a:rPr lang="en-US" smtClean="0"/>
+              <a:rPr lang="en-US"/>
               <a:t>Click to edit Master title style</a:t>
             </a:r>
-            <a:endParaRPr lang="en-US"/>
           </a:p>
         </p:txBody>
       </p:sp>
@@ -1040,7 +1076,7 @@
           <a:p>
             <a:pPr lvl="0"/>
             <a:r>
-              <a:rPr lang="en-US" smtClean="0"/>
+              <a:rPr lang="en-US"/>
               <a:t>Click to edit Master text styles</a:t>
             </a:r>
           </a:p>
@@ -1063,7 +1099,7 @@
           <a:p>
             <a:fld id="{5BCAD085-E8A6-8845-BD4E-CB4CCA059FC4}" type="datetimeFigureOut">
               <a:rPr lang="en-US" smtClean="0"/>
-              <a:t>1/27/13</a:t>
+              <a:t>10/14/2026</a:t>
             </a:fld>
             <a:endParaRPr lang="en-US"/>
           </a:p>
@@ -1157,10 +1193,9 @@
           <a:lstStyle/>
           <a:p>
             <a:r>
-              <a:rPr lang="en-US" smtClean="0"/>
+              <a:rPr lang="en-US"/>
               <a:t>Click to edit Master title style</a:t>
             </a:r>
-            <a:endParaRPr lang="en-US"/>
           </a:p>
         </p:txBody>
       </p:sp>
@@ -1214,38 +1249,37 @@
           <a:p>
             <a:pPr lvl="0"/>
             <a:r>
-              <a:rPr lang="en-US" smtClean="0"/>
+              <a:rPr lang="en-US"/>
               <a:t>Click to edit Master text styles</a:t>
             </a:r>
           </a:p>
           <a:p>
             <a:pPr lvl="1"/>
             <a:r>
-              <a:rPr lang="en-US" smtClean="0"/>
+              <a:rPr lang="en-US"/>
               <a:t>Second level</a:t>
             </a:r>
           </a:p>
           <a:p>
             <a:pPr lvl="2"/>
             <a:r>
-              <a:rPr lang="en-US" smtClean="0"/>
+              <a:rPr lang="en-US"/>
               <a:t>Third level</a:t>
             </a:r>
           </a:p>
           <a:p>
             <a:pPr lvl="3"/>
             <a:r>
-              <a:rPr lang="en-US" smtClean="0"/>
+              <a:rPr lang="en-US"/>
               <a:t>Fourth level</a:t>
             </a:r>
           </a:p>
           <a:p>
             <a:pPr lvl="4"/>
             <a:r>
-              <a:rPr lang="en-US" smtClean="0"/>
+              <a:rPr lang="en-US"/>
               <a:t>Fifth level</a:t>
             </a:r>
-            <a:endParaRPr lang="en-US"/>
           </a:p>
         </p:txBody>
       </p:sp>
@@ -1299,38 +1333,37 @@
           <a:p>
             <a:pPr lvl="0"/>
             <a:r>
-              <a:rPr lang="en-US" smtClean="0"/>
+              <a:rPr lang="en-US"/>
               <a:t>Click to edit Master text styles</a:t>
             </a:r>
           </a:p>
           <a:p>
             <a:pPr lvl="1"/>
             <a:r>
-              <a:rPr lang="en-US" smtClean="0"/>
+              <a:rPr lang="en-US"/>
               <a:t>Second level</a:t>
             </a:r>
           </a:p>
           <a:p>
             <a:pPr lvl="2"/>
             <a:r>
-              <a:rPr lang="en-US" smtClean="0"/>
+              <a:rPr lang="en-US"/>
               <a:t>Third level</a:t>
             </a:r>
           </a:p>
           <a:p>
             <a:pPr lvl="3"/>
             <a:r>
-              <a:rPr lang="en-US" smtClean="0"/>
+              <a:rPr lang="en-US"/>
               <a:t>Fourth level</a:t>
             </a:r>
           </a:p>
           <a:p>
             <a:pPr lvl="4"/>
             <a:r>
-              <a:rPr lang="en-US" smtClean="0"/>
+              <a:rPr lang="en-US"/>
               <a:t>Fifth level</a:t>
             </a:r>
-            <a:endParaRPr lang="en-US"/>
           </a:p>
         </p:txBody>
       </p:sp>
@@ -1351,7 +1384,7 @@
           <a:p>
             <a:fld id="{5BCAD085-E8A6-8845-BD4E-CB4CCA059FC4}" type="datetimeFigureOut">
               <a:rPr lang="en-US" smtClean="0"/>
-              <a:t>1/27/13</a:t>
+              <a:t>10/14/2026</a:t>
             </a:fld>
             <a:endParaRPr lang="en-US"/>
           </a:p>
@@ -1449,10 +1482,9 @@
           </a:lstStyle>
           <a:p>
             <a:r>
-              <a:rPr lang="en-US" smtClean="0"/>
+              <a:rPr lang="en-US"/>
               <a:t>Click to edit Master title style</a:t>
             </a:r>
-            <a:endParaRPr lang="en-US"/>
           </a:p>
         </p:txBody>
       </p:sp>
@@ -1515,7 +1547,7 @@
           <a:p>
             <a:pPr lvl="0"/>
             <a:r>
-              <a:rPr lang="en-US" smtClean="0"/>
+              <a:rPr lang="en-US"/>
               <a:t>Click to edit Master text styles</a:t>
             </a:r>
           </a:p>
@@ -1571,38 +1603,37 @@
           <a:p>
             <a:pPr lvl="0"/>
             <a:r>
-              <a:rPr lang="en-US" smtClean="0"/>
+              <a:rPr lang="en-US"/>
               <a:t>Click to edit Master text styles</a:t>
             </a:r>
           </a:p>
           <a:p>
             <a:pPr lvl="1"/>
             <a:r>
-              <a:rPr lang="en-US" smtClean="0"/>
+              <a:rPr lang="en-US"/>
               <a:t>Second level</a:t>
             </a:r>
           </a:p>
           <a:p>
             <a:pPr lvl="2"/>
             <a:r>
-              <a:rPr lang="en-US" smtClean="0"/>
+              <a:rPr lang="en-US"/>
               <a:t>Third level</a:t>
             </a:r>
           </a:p>
           <a:p>
             <a:pPr lvl="3"/>
             <a:r>
-              <a:rPr lang="en-US" smtClean="0"/>
+              <a:rPr lang="en-US"/>
               <a:t>Fourth level</a:t>
             </a:r>
           </a:p>
           <a:p>
             <a:pPr lvl="4"/>
             <a:r>
-              <a:rPr lang="en-US" smtClean="0"/>
+              <a:rPr lang="en-US"/>
               <a:t>Fifth level</a:t>
             </a:r>
-            <a:endParaRPr lang="en-US"/>
           </a:p>
         </p:txBody>
       </p:sp>
@@ -1665,7 +1696,7 @@
           <a:p>
             <a:pPr lvl="0"/>
             <a:r>
-              <a:rPr lang="en-US" smtClean="0"/>
+              <a:rPr lang="en-US"/>
               <a:t>Click to edit Master text styles</a:t>
             </a:r>
           </a:p>
@@ -1721,38 +1752,37 @@
           <a:p>
             <a:pPr lvl="0"/>
             <a:r>
-              <a:rPr lang="en-US" smtClean="0"/>
+              <a:rPr lang="en-US"/>
               <a:t>Click to edit Master text styles</a:t>
             </a:r>
           </a:p>
           <a:p>
             <a:pPr lvl="1"/>
             <a:r>
-              <a:rPr lang="en-US" smtClean="0"/>
+              <a:rPr lang="en-US"/>
               <a:t>Second level</a:t>
             </a:r>
           </a:p>
           <a:p>
             <a:pPr lvl="2"/>
             <a:r>
-              <a:rPr lang="en-US" smtClean="0"/>
+              <a:rPr lang="en-US"/>
               <a:t>Third level</a:t>
             </a:r>
           </a:p>
           <a:p>
             <a:pPr lvl="3"/>
             <a:r>
-              <a:rPr lang="en-US" smtClean="0"/>
+              <a:rPr lang="en-US"/>
               <a:t>Fourth level</a:t>
             </a:r>
           </a:p>
           <a:p>
             <a:pPr lvl="4"/>
             <a:r>
-              <a:rPr lang="en-US" smtClean="0"/>
+              <a:rPr lang="en-US"/>
               <a:t>Fifth level</a:t>
             </a:r>
-            <a:endParaRPr lang="en-US"/>
           </a:p>
         </p:txBody>
       </p:sp>
@@ -1773,7 +1803,7 @@
           <a:p>
             <a:fld id="{5BCAD085-E8A6-8845-BD4E-CB4CCA059FC4}" type="datetimeFigureOut">
               <a:rPr lang="en-US" smtClean="0"/>
-              <a:t>1/27/13</a:t>
+              <a:t>10/14/2026</a:t>
             </a:fld>
             <a:endParaRPr lang="en-US"/>
           </a:p>
@@ -1867,10 +1897,9 @@
           <a:lstStyle/>
           <a:p>
             <a:r>
-              <a:rPr lang="en-US" smtClean="0"/>
+              <a:rPr lang="en-US"/>
               <a:t>Click to edit Master title style</a:t>
             </a:r>
-            <a:endParaRPr lang="en-US"/>
           </a:p>
         </p:txBody>
       </p:sp>
@@ -1891,7 +1920,7 @@
           <a:p>
             <a:fld id="{5BCAD085-E8A6-8845-BD4E-CB4CCA059FC4}" type="datetimeFigureOut">
               <a:rPr lang="en-US" smtClean="0"/>
-              <a:t>1/27/13</a:t>
+              <a:t>10/14/2026</a:t>
             </a:fld>
             <a:endParaRPr lang="en-US"/>
           </a:p>
@@ -1986,7 +2015,7 @@
           <a:p>
             <a:fld id="{5BCAD085-E8A6-8845-BD4E-CB4CCA059FC4}" type="datetimeFigureOut">
               <a:rPr lang="en-US" smtClean="0"/>
-              <a:t>1/27/13</a:t>
+              <a:t>10/14/2026</a:t>
             </a:fld>
             <a:endParaRPr lang="en-US"/>
           </a:p>
@@ -2089,10 +2118,9 @@
           </a:lstStyle>
           <a:p>
             <a:r>
-              <a:rPr lang="en-US" smtClean="0"/>
+              <a:rPr lang="en-US"/>
               <a:t>Click to edit Master title style</a:t>
             </a:r>
-            <a:endParaRPr lang="en-US"/>
           </a:p>
         </p:txBody>
       </p:sp>
@@ -2146,38 +2174,37 @@
           <a:p>
             <a:pPr lvl="0"/>
             <a:r>
-              <a:rPr lang="en-US" smtClean="0"/>
+              <a:rPr lang="en-US"/>
               <a:t>Click to edit Master text styles</a:t>
             </a:r>
           </a:p>
           <a:p>
             <a:pPr lvl="1"/>
             <a:r>
-              <a:rPr lang="en-US" smtClean="0"/>
+              <a:rPr lang="en-US"/>
               <a:t>Second level</a:t>
             </a:r>
           </a:p>
           <a:p>
             <a:pPr lvl="2"/>
             <a:r>
-              <a:rPr lang="en-US" smtClean="0"/>
+              <a:rPr lang="en-US"/>
               <a:t>Third level</a:t>
             </a:r>
           </a:p>
           <a:p>
             <a:pPr lvl="3"/>
             <a:r>
-              <a:rPr lang="en-US" smtClean="0"/>
+              <a:rPr lang="en-US"/>
               <a:t>Fourth level</a:t>
             </a:r>
           </a:p>
           <a:p>
             <a:pPr lvl="4"/>
             <a:r>
-              <a:rPr lang="en-US" smtClean="0"/>
+              <a:rPr lang="en-US"/>
               <a:t>Fifth level</a:t>
             </a:r>
-            <a:endParaRPr lang="en-US"/>
           </a:p>
         </p:txBody>
       </p:sp>
@@ -2240,7 +2267,7 @@
           <a:p>
             <a:pPr lvl="0"/>
             <a:r>
-              <a:rPr lang="en-US" smtClean="0"/>
+              <a:rPr lang="en-US"/>
               <a:t>Click to edit Master text styles</a:t>
             </a:r>
           </a:p>
@@ -2263,7 +2290,7 @@
           <a:p>
             <a:fld id="{5BCAD085-E8A6-8845-BD4E-CB4CCA059FC4}" type="datetimeFigureOut">
               <a:rPr lang="en-US" smtClean="0"/>
-              <a:t>1/27/13</a:t>
+              <a:t>10/14/2026</a:t>
             </a:fld>
             <a:endParaRPr lang="en-US"/>
           </a:p>
@@ -2366,10 +2393,9 @@
           </a:lstStyle>
           <a:p>
             <a:r>
-              <a:rPr lang="en-US" smtClean="0"/>
+              <a:rPr lang="en-US"/>
               <a:t>Click to edit Master title style</a:t>
             </a:r>
-            <a:endParaRPr lang="en-US"/>
           </a:p>
         </p:txBody>
       </p:sp>
@@ -2493,7 +2519,7 @@
           <a:p>
             <a:pPr lvl="0"/>
             <a:r>
-              <a:rPr lang="en-US" smtClean="0"/>
+              <a:rPr lang="en-US"/>
               <a:t>Click to edit Master text styles</a:t>
             </a:r>
           </a:p>
@@ -2516,7 +2542,7 @@
           <a:p>
             <a:fld id="{5BCAD085-E8A6-8845-BD4E-CB4CCA059FC4}" type="datetimeFigureOut">
               <a:rPr lang="en-US" smtClean="0"/>
-              <a:t>1/27/13</a:t>
+              <a:t>10/14/2026</a:t>
             </a:fld>
             <a:endParaRPr lang="en-US"/>
           </a:p>
@@ -2625,10 +2651,9 @@
           <a:lstStyle/>
           <a:p>
             <a:r>
-              <a:rPr lang="en-US" smtClean="0"/>
+              <a:rPr lang="en-US"/>
               <a:t>Click to edit Master title style</a:t>
             </a:r>
-            <a:endParaRPr lang="en-US"/>
           </a:p>
         </p:txBody>
       </p:sp>
@@ -2659,38 +2684,37 @@
           <a:p>
             <a:pPr lvl="0"/>
             <a:r>
-              <a:rPr lang="en-US" smtClean="0"/>
+              <a:rPr lang="en-US"/>
               <a:t>Click to edit Master text styles</a:t>
             </a:r>
           </a:p>
           <a:p>
             <a:pPr lvl="1"/>
             <a:r>
-              <a:rPr lang="en-US" smtClean="0"/>
+              <a:rPr lang="en-US"/>
               <a:t>Second level</a:t>
             </a:r>
           </a:p>
           <a:p>
             <a:pPr lvl="2"/>
             <a:r>
-              <a:rPr lang="en-US" smtClean="0"/>
+              <a:rPr lang="en-US"/>
               <a:t>Third level</a:t>
             </a:r>
           </a:p>
           <a:p>
             <a:pPr lvl="3"/>
             <a:r>
-              <a:rPr lang="en-US" smtClean="0"/>
+              <a:rPr lang="en-US"/>
               <a:t>Fourth level</a:t>
             </a:r>
           </a:p>
           <a:p>
             <a:pPr lvl="4"/>
             <a:r>
-              <a:rPr lang="en-US" smtClean="0"/>
+              <a:rPr lang="en-US"/>
               <a:t>Fifth level</a:t>
             </a:r>
-            <a:endParaRPr lang="en-US"/>
           </a:p>
         </p:txBody>
       </p:sp>
@@ -2729,7 +2753,7 @@
           <a:p>
             <a:fld id="{5BCAD085-E8A6-8845-BD4E-CB4CCA059FC4}" type="datetimeFigureOut">
               <a:rPr lang="en-US" smtClean="0"/>
-              <a:t>1/27/13</a:t>
+              <a:t>10/14/2026</a:t>
             </a:fld>
             <a:endParaRPr lang="en-US"/>
           </a:p>
@@ -3088,7 +3112,7 @@
 </file>
 
 <file path=ppt/slides/slide1.xml><?xml version="1.0" encoding="utf-8"?>
-<p:sld xmlns:a="http://schemas.openxmlformats.org/drawingml/2006/main" xmlns:p="http://schemas.openxmlformats.org/presentationml/2006/main" xmlns:r="http://schemas.openxmlformats.org/officeDocument/2006/relationships">
+<p:sld xmlns:a="http://schemas.openxmlformats.org/drawingml/2006/main" xmlns:r="http://schemas.openxmlformats.org/officeDocument/2006/relationships" xmlns:p="http://schemas.openxmlformats.org/presentationml/2006/main">
   <p:cSld>
     <p:bg>
       <p:bgPr>
@@ -3104,7 +3128,14 @@
         <p:cNvGrpSpPr/>
         <p:nvPr/>
       </p:nvGrpSpPr>
-      <p:grpSpPr/>
+      <p:grpSpPr>
+        <a:xfrm>
+          <a:off x="0" y="0"/>
+          <a:ext cx="0" cy="0"/>
+          <a:chOff x="0" y="0"/>
+          <a:chExt cx="0" cy="0"/>
+        </a:xfrm>
+      </p:grpSpPr>
       <p:sp>
         <p:nvSpPr>
           <p:cNvPr id="2" name="Rectangle 1"/>
@@ -3145,6 +3176,7 @@
           <a:lstStyle/>
           <a:p>
             <a:pPr algn="ctr"/>
+            <a:endParaRPr/>
           </a:p>
         </p:txBody>
       </p:sp>
@@ -3285,7 +3317,7 @@
           </a:fontRef>
         </p:style>
         <p:txBody>
-          <a:bodyPr rtlCol="0" anchor="ctr" wrap="square" lIns="152400"/>
+          <a:bodyPr wrap="square" lIns="152400" rtlCol="0" anchor="ctr"/>
           <a:lstStyle/>
           <a:p>
             <a:pPr algn="ctr"/>
@@ -3342,7 +3374,7 @@
 </file>
 
 <file path=ppt/slides/slide10.xml><?xml version="1.0" encoding="utf-8"?>
-<p:sld xmlns:a="http://schemas.openxmlformats.org/drawingml/2006/main" xmlns:p="http://schemas.openxmlformats.org/presentationml/2006/main" xmlns:r="http://schemas.openxmlformats.org/officeDocument/2006/relationships">
+<p:sld xmlns:a="http://schemas.openxmlformats.org/drawingml/2006/main" xmlns:r="http://schemas.openxmlformats.org/officeDocument/2006/relationships" xmlns:p="http://schemas.openxmlformats.org/presentationml/2006/main">
   <p:cSld>
     <p:bg>
       <p:bgPr>
@@ -3358,7 +3390,14 @@
         <p:cNvGrpSpPr/>
         <p:nvPr/>
       </p:nvGrpSpPr>
-      <p:grpSpPr/>
+      <p:grpSpPr>
+        <a:xfrm>
+          <a:off x="0" y="0"/>
+          <a:ext cx="0" cy="0"/>
+          <a:chOff x="0" y="0"/>
+          <a:chExt cx="0" cy="0"/>
+        </a:xfrm>
+      </p:grpSpPr>
       <p:sp>
         <p:nvSpPr>
           <p:cNvPr id="2" name="TextBox 1"/>
@@ -3588,7 +3627,7 @@
 </file>
 
 <file path=ppt/slides/slide2.xml><?xml version="1.0" encoding="utf-8"?>
-<p:sld xmlns:a="http://schemas.openxmlformats.org/drawingml/2006/main" xmlns:p="http://schemas.openxmlformats.org/presentationml/2006/main" xmlns:r="http://schemas.openxmlformats.org/officeDocument/2006/relationships">
+<p:sld xmlns:a="http://schemas.openxmlformats.org/drawingml/2006/main" xmlns:r="http://schemas.openxmlformats.org/officeDocument/2006/relationships" xmlns:p="http://schemas.openxmlformats.org/presentationml/2006/main">
   <p:cSld>
     <p:bg>
       <p:bgPr>
@@ -3604,7 +3643,14 @@
         <p:cNvGrpSpPr/>
         <p:nvPr/>
       </p:nvGrpSpPr>
-      <p:grpSpPr/>
+      <p:grpSpPr>
+        <a:xfrm>
+          <a:off x="0" y="0"/>
+          <a:ext cx="0" cy="0"/>
+          <a:chOff x="0" y="0"/>
+          <a:chExt cx="0" cy="0"/>
+        </a:xfrm>
+      </p:grpSpPr>
       <p:sp>
         <p:nvSpPr>
           <p:cNvPr id="2" name="TextBox 1"/>
@@ -3798,7 +3844,7 @@
           </a:fontRef>
         </p:style>
         <p:txBody>
-          <a:bodyPr rtlCol="0" anchor="ctr" wrap="square" lIns="152400" rIns="152400" tIns="101600" bIns="101600"/>
+          <a:bodyPr wrap="square" lIns="152400" tIns="101600" rIns="152400" bIns="101600" rtlCol="0" anchor="ctr"/>
           <a:lstStyle/>
           <a:p>
             <a:pPr algn="l"/>
@@ -3864,7 +3910,7 @@
           </a:fontRef>
         </p:style>
         <p:txBody>
-          <a:bodyPr rtlCol="0" anchor="ctr" wrap="square" lIns="152400" rIns="152400" tIns="101600" bIns="101600"/>
+          <a:bodyPr wrap="square" lIns="152400" tIns="101600" rIns="152400" bIns="101600" rtlCol="0" anchor="ctr"/>
           <a:lstStyle/>
           <a:p>
             <a:pPr algn="l"/>
@@ -3930,7 +3976,7 @@
           </a:fontRef>
         </p:style>
         <p:txBody>
-          <a:bodyPr rtlCol="0" anchor="ctr" wrap="square" lIns="152400" rIns="152400" tIns="101600" bIns="101600"/>
+          <a:bodyPr wrap="square" lIns="152400" tIns="101600" rIns="152400" bIns="101600" rtlCol="0" anchor="ctr"/>
           <a:lstStyle/>
           <a:p>
             <a:pPr algn="l"/>
@@ -3967,7 +4013,7 @@
 </file>
 
 <file path=ppt/slides/slide3.xml><?xml version="1.0" encoding="utf-8"?>
-<p:sld xmlns:a="http://schemas.openxmlformats.org/drawingml/2006/main" xmlns:p="http://schemas.openxmlformats.org/presentationml/2006/main" xmlns:r="http://schemas.openxmlformats.org/officeDocument/2006/relationships">
+<p:sld xmlns:a="http://schemas.openxmlformats.org/drawingml/2006/main" xmlns:r="http://schemas.openxmlformats.org/officeDocument/2006/relationships" xmlns:p="http://schemas.openxmlformats.org/presentationml/2006/main">
   <p:cSld>
     <p:bg>
       <p:bgPr>
@@ -3983,7 +4029,14 @@
         <p:cNvGrpSpPr/>
         <p:nvPr/>
       </p:nvGrpSpPr>
-      <p:grpSpPr/>
+      <p:grpSpPr>
+        <a:xfrm>
+          <a:off x="0" y="0"/>
+          <a:ext cx="0" cy="0"/>
+          <a:chOff x="0" y="0"/>
+          <a:chExt cx="0" cy="0"/>
+        </a:xfrm>
+      </p:grpSpPr>
       <p:sp>
         <p:nvSpPr>
           <p:cNvPr id="2" name="TextBox 1"/>
@@ -4090,7 +4143,7 @@
           </a:fontRef>
         </p:style>
         <p:txBody>
-          <a:bodyPr rtlCol="0" anchor="ctr" wrap="square"/>
+          <a:bodyPr wrap="square" rtlCol="0" anchor="ctr"/>
           <a:lstStyle/>
           <a:p>
             <a:pPr algn="ctr"/>
@@ -4153,7 +4206,7 @@
           </a:fontRef>
         </p:style>
         <p:txBody>
-          <a:bodyPr rtlCol="0" anchor="ctr" wrap="square"/>
+          <a:bodyPr wrap="square" rtlCol="0" anchor="ctr"/>
           <a:lstStyle/>
           <a:p>
             <a:pPr algn="ctr"/>
@@ -4216,7 +4269,7 @@
           </a:fontRef>
         </p:style>
         <p:txBody>
-          <a:bodyPr rtlCol="0" anchor="ctr" wrap="square"/>
+          <a:bodyPr wrap="square" rtlCol="0" anchor="ctr"/>
           <a:lstStyle/>
           <a:p>
             <a:pPr algn="ctr"/>
@@ -4279,7 +4332,7 @@
           </a:fontRef>
         </p:style>
         <p:txBody>
-          <a:bodyPr rtlCol="0" anchor="ctr" wrap="square"/>
+          <a:bodyPr wrap="square" rtlCol="0" anchor="ctr"/>
           <a:lstStyle/>
           <a:p>
             <a:pPr algn="ctr"/>
@@ -4342,7 +4395,7 @@
           </a:fontRef>
         </p:style>
         <p:txBody>
-          <a:bodyPr rtlCol="0" anchor="ctr" wrap="square"/>
+          <a:bodyPr wrap="square" rtlCol="0" anchor="ctr"/>
           <a:lstStyle/>
           <a:p>
             <a:pPr algn="ctr"/>
@@ -4376,7 +4429,7 @@
 </file>
 
 <file path=ppt/slides/slide4.xml><?xml version="1.0" encoding="utf-8"?>
-<p:sld xmlns:a="http://schemas.openxmlformats.org/drawingml/2006/main" xmlns:p="http://schemas.openxmlformats.org/presentationml/2006/main" xmlns:r="http://schemas.openxmlformats.org/officeDocument/2006/relationships">
+<p:sld xmlns:a="http://schemas.openxmlformats.org/drawingml/2006/main" xmlns:r="http://schemas.openxmlformats.org/officeDocument/2006/relationships" xmlns:p="http://schemas.openxmlformats.org/presentationml/2006/main">
   <p:cSld>
     <p:bg>
       <p:bgPr>
@@ -4392,7 +4445,14 @@
         <p:cNvGrpSpPr/>
         <p:nvPr/>
       </p:nvGrpSpPr>
-      <p:grpSpPr/>
+      <p:grpSpPr>
+        <a:xfrm>
+          <a:off x="0" y="0"/>
+          <a:ext cx="0" cy="0"/>
+          <a:chOff x="0" y="0"/>
+          <a:chExt cx="0" cy="0"/>
+        </a:xfrm>
+      </p:grpSpPr>
       <p:sp>
         <p:nvSpPr>
           <p:cNvPr id="2" name="TextBox 1"/>
@@ -4499,7 +4559,7 @@
           </a:fontRef>
         </p:style>
         <p:txBody>
-          <a:bodyPr rtlCol="0" anchor="ctr" wrap="square" lIns="152400" rIns="152400" tIns="101600" bIns="101600"/>
+          <a:bodyPr wrap="square" lIns="152400" tIns="101600" rIns="152400" bIns="101600" rtlCol="0" anchor="ctr"/>
           <a:lstStyle/>
           <a:p>
             <a:pPr algn="l"/>
@@ -4565,7 +4625,7 @@
           </a:fontRef>
         </p:style>
         <p:txBody>
-          <a:bodyPr rtlCol="0" anchor="ctr" wrap="square" lIns="152400" rIns="152400" tIns="101600" bIns="101600"/>
+          <a:bodyPr wrap="square" lIns="152400" tIns="101600" rIns="152400" bIns="101600" rtlCol="0" anchor="ctr"/>
           <a:lstStyle/>
           <a:p>
             <a:pPr algn="l"/>
@@ -4631,7 +4691,7 @@
           </a:fontRef>
         </p:style>
         <p:txBody>
-          <a:bodyPr rtlCol="0" anchor="ctr" wrap="square" lIns="152400" rIns="152400" tIns="101600" bIns="101600"/>
+          <a:bodyPr wrap="square" lIns="152400" tIns="101600" rIns="152400" bIns="101600" rtlCol="0" anchor="ctr"/>
           <a:lstStyle/>
           <a:p>
             <a:pPr algn="l"/>
@@ -4697,7 +4757,7 @@
           </a:fontRef>
         </p:style>
         <p:txBody>
-          <a:bodyPr rtlCol="0" anchor="ctr" wrap="square" lIns="152400" rIns="152400" tIns="101600" bIns="101600"/>
+          <a:bodyPr wrap="square" lIns="152400" tIns="101600" rIns="152400" bIns="101600" rtlCol="0" anchor="ctr"/>
           <a:lstStyle/>
           <a:p>
             <a:pPr algn="l"/>
@@ -4734,7 +4794,7 @@
         <p:spPr>
           <a:xfrm>
             <a:off x="731520" y="3840480"/>
-            <a:ext cx="6858000" cy="1645920"/>
+            <a:ext cx="6858000" cy="1128514"/>
           </a:xfrm>
           <a:prstGeom prst="rect">
             <a:avLst/>
@@ -4769,7 +4829,7 @@
               </a:spcAft>
             </a:pPr>
             <a:r>
-              <a:rPr sz="1800">
+              <a:rPr sz="1800" dirty="0">
                 <a:solidFill>
                   <a:srgbClr val="FFFFFF"/>
                 </a:solidFill>
@@ -4785,7 +4845,7 @@
               </a:spcAft>
             </a:pPr>
             <a:r>
-              <a:rPr sz="1800">
+              <a:rPr sz="1800" dirty="0">
                 <a:solidFill>
                   <a:srgbClr val="FFFFFF"/>
                 </a:solidFill>
@@ -4805,7 +4865,7 @@
 </file>
 
 <file path=ppt/slides/slide5.xml><?xml version="1.0" encoding="utf-8"?>
-<p:sld xmlns:a="http://schemas.openxmlformats.org/drawingml/2006/main" xmlns:p="http://schemas.openxmlformats.org/presentationml/2006/main" xmlns:r="http://schemas.openxmlformats.org/officeDocument/2006/relationships">
+<p:sld xmlns:a="http://schemas.openxmlformats.org/drawingml/2006/main" xmlns:r="http://schemas.openxmlformats.org/officeDocument/2006/relationships" xmlns:p="http://schemas.openxmlformats.org/presentationml/2006/main">
   <p:cSld>
     <p:bg>
       <p:bgPr>
@@ -4821,7 +4881,14 @@
         <p:cNvGrpSpPr/>
         <p:nvPr/>
       </p:nvGrpSpPr>
-      <p:grpSpPr/>
+      <p:grpSpPr>
+        <a:xfrm>
+          <a:off x="0" y="0"/>
+          <a:ext cx="0" cy="0"/>
+          <a:chOff x="0" y="0"/>
+          <a:chExt cx="0" cy="0"/>
+        </a:xfrm>
+      </p:grpSpPr>
       <p:sp>
         <p:nvSpPr>
           <p:cNvPr id="2" name="TextBox 1"/>
@@ -4928,7 +4995,7 @@
           </a:fontRef>
         </p:style>
         <p:txBody>
-          <a:bodyPr rtlCol="0" anchor="ctr" wrap="square"/>
+          <a:bodyPr wrap="square" rtlCol="0" anchor="ctr"/>
           <a:lstStyle/>
           <a:p>
             <a:pPr algn="ctr"/>
@@ -4991,7 +5058,7 @@
           </a:fontRef>
         </p:style>
         <p:txBody>
-          <a:bodyPr rtlCol="0" anchor="ctr" wrap="square"/>
+          <a:bodyPr wrap="square" rtlCol="0" anchor="ctr"/>
           <a:lstStyle/>
           <a:p>
             <a:pPr algn="ctr"/>
@@ -5054,7 +5121,7 @@
           </a:fontRef>
         </p:style>
         <p:txBody>
-          <a:bodyPr rtlCol="0" anchor="ctr" wrap="square"/>
+          <a:bodyPr wrap="square" rtlCol="0" anchor="ctr"/>
           <a:lstStyle/>
           <a:p>
             <a:pPr algn="ctr"/>
@@ -5117,7 +5184,7 @@
           </a:fontRef>
         </p:style>
         <p:txBody>
-          <a:bodyPr rtlCol="0" anchor="ctr" wrap="square"/>
+          <a:bodyPr wrap="square" rtlCol="0" anchor="ctr"/>
           <a:lstStyle/>
           <a:p>
             <a:pPr algn="ctr"/>
@@ -5180,7 +5247,7 @@
           </a:fontRef>
         </p:style>
         <p:txBody>
-          <a:bodyPr rtlCol="0" anchor="ctr" wrap="square"/>
+          <a:bodyPr wrap="square" rtlCol="0" anchor="ctr"/>
           <a:lstStyle/>
           <a:p>
             <a:pPr algn="ctr"/>
@@ -5214,7 +5281,7 @@
 </file>
 
 <file path=ppt/slides/slide6.xml><?xml version="1.0" encoding="utf-8"?>
-<p:sld xmlns:a="http://schemas.openxmlformats.org/drawingml/2006/main" xmlns:p="http://schemas.openxmlformats.org/presentationml/2006/main" xmlns:r="http://schemas.openxmlformats.org/officeDocument/2006/relationships">
+<p:sld xmlns:a="http://schemas.openxmlformats.org/drawingml/2006/main" xmlns:r="http://schemas.openxmlformats.org/officeDocument/2006/relationships" xmlns:p="http://schemas.openxmlformats.org/presentationml/2006/main">
   <p:cSld>
     <p:bg>
       <p:bgPr>
@@ -5230,7 +5297,14 @@
         <p:cNvGrpSpPr/>
         <p:nvPr/>
       </p:nvGrpSpPr>
-      <p:grpSpPr/>
+      <p:grpSpPr>
+        <a:xfrm>
+          <a:off x="0" y="0"/>
+          <a:ext cx="0" cy="0"/>
+          <a:chOff x="0" y="0"/>
+          <a:chExt cx="0" cy="0"/>
+        </a:xfrm>
+      </p:grpSpPr>
       <p:sp>
         <p:nvSpPr>
           <p:cNvPr id="2" name="TextBox 1"/>
@@ -5456,7 +5530,7 @@
           </a:fontRef>
         </p:style>
         <p:txBody>
-          <a:bodyPr rtlCol="0" anchor="ctr" wrap="square" lIns="152400" rIns="152400" tIns="101600" bIns="101600"/>
+          <a:bodyPr wrap="square" lIns="152400" tIns="101600" rIns="152400" bIns="101600" rtlCol="0" anchor="ctr"/>
           <a:lstStyle/>
           <a:p>
             <a:pPr algn="l"/>
@@ -5522,7 +5596,7 @@
           </a:fontRef>
         </p:style>
         <p:txBody>
-          <a:bodyPr rtlCol="0" anchor="ctr" wrap="square" lIns="152400" rIns="152400" tIns="101600" bIns="101600"/>
+          <a:bodyPr wrap="square" lIns="152400" tIns="101600" rIns="152400" bIns="101600" rtlCol="0" anchor="ctr"/>
           <a:lstStyle/>
           <a:p>
             <a:pPr algn="l"/>
@@ -5559,7 +5633,7 @@
 </file>
 
 <file path=ppt/slides/slide7.xml><?xml version="1.0" encoding="utf-8"?>
-<p:sld xmlns:a="http://schemas.openxmlformats.org/drawingml/2006/main" xmlns:p="http://schemas.openxmlformats.org/presentationml/2006/main" xmlns:r="http://schemas.openxmlformats.org/officeDocument/2006/relationships">
+<p:sld xmlns:a="http://schemas.openxmlformats.org/drawingml/2006/main" xmlns:r="http://schemas.openxmlformats.org/officeDocument/2006/relationships" xmlns:p="http://schemas.openxmlformats.org/presentationml/2006/main">
   <p:cSld>
     <p:bg>
       <p:bgPr>
@@ -5575,7 +5649,14 @@
         <p:cNvGrpSpPr/>
         <p:nvPr/>
       </p:nvGrpSpPr>
-      <p:grpSpPr/>
+      <p:grpSpPr>
+        <a:xfrm>
+          <a:off x="0" y="0"/>
+          <a:ext cx="0" cy="0"/>
+          <a:chOff x="0" y="0"/>
+          <a:chExt cx="0" cy="0"/>
+        </a:xfrm>
+      </p:grpSpPr>
       <p:sp>
         <p:nvSpPr>
           <p:cNvPr id="2" name="TextBox 1"/>
@@ -5682,7 +5763,7 @@
           </a:fontRef>
         </p:style>
         <p:txBody>
-          <a:bodyPr rtlCol="0" anchor="ctr" wrap="square" lIns="152400" rIns="152400" tIns="101600" bIns="101600"/>
+          <a:bodyPr wrap="square" lIns="152400" tIns="101600" rIns="152400" bIns="101600" rtlCol="0" anchor="ctr"/>
           <a:lstStyle/>
           <a:p>
             <a:pPr algn="l"/>
@@ -5748,7 +5829,7 @@
           </a:fontRef>
         </p:style>
         <p:txBody>
-          <a:bodyPr rtlCol="0" anchor="ctr" wrap="square" lIns="152400" rIns="152400" tIns="101600" bIns="101600"/>
+          <a:bodyPr wrap="square" lIns="152400" tIns="101600" rIns="152400" bIns="101600" rtlCol="0" anchor="ctr"/>
           <a:lstStyle/>
           <a:p>
             <a:pPr algn="l"/>
@@ -5814,7 +5895,7 @@
           </a:fontRef>
         </p:style>
         <p:txBody>
-          <a:bodyPr rtlCol="0" anchor="ctr" wrap="square" lIns="152400" rIns="152400" tIns="101600" bIns="101600"/>
+          <a:bodyPr wrap="square" lIns="152400" tIns="101600" rIns="152400" bIns="101600" rtlCol="0" anchor="ctr"/>
           <a:lstStyle/>
           <a:p>
             <a:pPr algn="l"/>
@@ -5880,7 +5961,7 @@
           </a:fontRef>
         </p:style>
         <p:txBody>
-          <a:bodyPr rtlCol="0" anchor="ctr" wrap="square" lIns="152400" rIns="152400" tIns="101600" bIns="101600"/>
+          <a:bodyPr wrap="square" lIns="152400" tIns="101600" rIns="152400" bIns="101600" rtlCol="0" anchor="ctr"/>
           <a:lstStyle/>
           <a:p>
             <a:pPr algn="l"/>
@@ -5988,7 +6069,7 @@
 </file>
 
 <file path=ppt/slides/slide8.xml><?xml version="1.0" encoding="utf-8"?>
-<p:sld xmlns:a="http://schemas.openxmlformats.org/drawingml/2006/main" xmlns:p="http://schemas.openxmlformats.org/presentationml/2006/main" xmlns:r="http://schemas.openxmlformats.org/officeDocument/2006/relationships">
+<p:sld xmlns:a="http://schemas.openxmlformats.org/drawingml/2006/main" xmlns:r="http://schemas.openxmlformats.org/officeDocument/2006/relationships" xmlns:p="http://schemas.openxmlformats.org/presentationml/2006/main">
   <p:cSld>
     <p:bg>
       <p:bgPr>
@@ -6004,7 +6085,14 @@
         <p:cNvGrpSpPr/>
         <p:nvPr/>
       </p:nvGrpSpPr>
-      <p:grpSpPr/>
+      <p:grpSpPr>
+        <a:xfrm>
+          <a:off x="0" y="0"/>
+          <a:ext cx="0" cy="0"/>
+          <a:chOff x="0" y="0"/>
+          <a:chExt cx="0" cy="0"/>
+        </a:xfrm>
+      </p:grpSpPr>
       <p:sp>
         <p:nvSpPr>
           <p:cNvPr id="2" name="TextBox 1"/>
@@ -6214,7 +6302,7 @@
           </a:fontRef>
         </p:style>
         <p:txBody>
-          <a:bodyPr rtlCol="0" anchor="ctr" wrap="square" lIns="152400" rIns="152400" tIns="101600" bIns="101600"/>
+          <a:bodyPr wrap="square" lIns="152400" tIns="101600" rIns="152400" bIns="101600" rtlCol="0" anchor="ctr"/>
           <a:lstStyle/>
           <a:p>
             <a:pPr algn="l"/>
@@ -6280,7 +6368,7 @@
           </a:fontRef>
         </p:style>
         <p:txBody>
-          <a:bodyPr rtlCol="0" anchor="ctr" wrap="square" lIns="152400" rIns="152400" tIns="101600" bIns="101600"/>
+          <a:bodyPr wrap="square" lIns="152400" tIns="101600" rIns="152400" bIns="101600" rtlCol="0" anchor="ctr"/>
           <a:lstStyle/>
           <a:p>
             <a:pPr algn="l"/>
@@ -6317,7 +6405,7 @@
 </file>
 
 <file path=ppt/slides/slide9.xml><?xml version="1.0" encoding="utf-8"?>
-<p:sld xmlns:a="http://schemas.openxmlformats.org/drawingml/2006/main" xmlns:p="http://schemas.openxmlformats.org/presentationml/2006/main" xmlns:r="http://schemas.openxmlformats.org/officeDocument/2006/relationships">
+<p:sld xmlns:a="http://schemas.openxmlformats.org/drawingml/2006/main" xmlns:r="http://schemas.openxmlformats.org/officeDocument/2006/relationships" xmlns:p="http://schemas.openxmlformats.org/presentationml/2006/main">
   <p:cSld>
     <p:bg>
       <p:bgPr>
@@ -6333,7 +6421,14 @@
         <p:cNvGrpSpPr/>
         <p:nvPr/>
       </p:nvGrpSpPr>
-      <p:grpSpPr/>
+      <p:grpSpPr>
+        <a:xfrm>
+          <a:off x="0" y="0"/>
+          <a:ext cx="0" cy="0"/>
+          <a:chOff x="0" y="0"/>
+          <a:chExt cx="0" cy="0"/>
+        </a:xfrm>
+      </p:grpSpPr>
       <p:sp>
         <p:nvSpPr>
           <p:cNvPr id="2" name="TextBox 1"/>
@@ -6575,7 +6670,7 @@
           </a:fontRef>
         </p:style>
         <p:txBody>
-          <a:bodyPr rtlCol="0" anchor="ctr" wrap="square" lIns="152400" rIns="152400" tIns="101600" bIns="101600"/>
+          <a:bodyPr wrap="square" lIns="152400" tIns="101600" rIns="152400" bIns="101600" rtlCol="0" anchor="ctr"/>
           <a:lstStyle/>
           <a:p>
             <a:pPr algn="l"/>
